--- a/topic-06-week6/unit-1/talk-2-subnetting/subnetting.pptx
+++ b/topic-06-week6/unit-1/talk-2-subnetting/subnetting.pptx
@@ -214,7 +214,7 @@
           <a:p>
             <a:fld id="{898C4193-BEF1-424E-A687-E394BEF15677}" type="datetimeFigureOut">
               <a:rPr lang="en-GB" smtClean="0"/>
-              <a:t>12/10/2025</a:t>
+              <a:t>04/03/2026</a:t>
             </a:fld>
             <a:endParaRPr lang="en-GB"/>
           </a:p>
@@ -526,37 +526,6 @@
           <a:bodyPr/>
           <a:lstStyle/>
           <a:p>
-            <a:pPr>
-              <a:buFontTx/>
-              <a:buNone/>
-            </a:pPr>
-            <a:r>
-              <a:rPr lang="en-US" b="0" dirty="0"/>
-              <a:t>Cisco Networking Academy Program</a:t>
-            </a:r>
-          </a:p>
-          <a:p>
-            <a:pPr>
-              <a:buFontTx/>
-              <a:buNone/>
-            </a:pPr>
-            <a:r>
-              <a:rPr lang="en-US" b="0" dirty="0"/>
-              <a:t>Introduction to Networks v7.0 (ITN)</a:t>
-            </a:r>
-          </a:p>
-          <a:p>
-            <a:pPr>
-              <a:buFontTx/>
-              <a:buNone/>
-            </a:pPr>
-            <a:r>
-              <a:rPr lang="en-US" sz="1200" b="0" dirty="0"/>
-              <a:t>Module 9: Address Resolution</a:t>
-            </a:r>
-            <a:endParaRPr lang="en-GB" b="0" dirty="0"/>
-          </a:p>
-          <a:p>
             <a:endParaRPr lang="en-US" dirty="0"/>
           </a:p>
         </p:txBody>
@@ -910,7 +879,7 @@
           <a:p>
             <a:fld id="{846CE7D5-CF57-46EF-B807-FDD0502418D4}" type="datetimeFigureOut">
               <a:rPr lang="en-US" smtClean="0"/>
-              <a:t>10/12/2025</a:t>
+              <a:t>3/4/2026</a:t>
             </a:fld>
             <a:endParaRPr lang="en-US"/>
           </a:p>
@@ -1080,7 +1049,7 @@
           <a:p>
             <a:fld id="{846CE7D5-CF57-46EF-B807-FDD0502418D4}" type="datetimeFigureOut">
               <a:rPr lang="en-US" smtClean="0"/>
-              <a:t>10/12/2025</a:t>
+              <a:t>3/4/2026</a:t>
             </a:fld>
             <a:endParaRPr lang="en-US"/>
           </a:p>
@@ -1260,7 +1229,7 @@
           <a:p>
             <a:fld id="{846CE7D5-CF57-46EF-B807-FDD0502418D4}" type="datetimeFigureOut">
               <a:rPr lang="en-US" smtClean="0"/>
-              <a:t>10/12/2025</a:t>
+              <a:t>3/4/2026</a:t>
             </a:fld>
             <a:endParaRPr lang="en-US"/>
           </a:p>
@@ -3806,7 +3775,7 @@
           <a:p>
             <a:fld id="{846CE7D5-CF57-46EF-B807-FDD0502418D4}" type="datetimeFigureOut">
               <a:rPr lang="en-US" smtClean="0"/>
-              <a:t>10/12/2025</a:t>
+              <a:t>3/4/2026</a:t>
             </a:fld>
             <a:endParaRPr lang="en-US"/>
           </a:p>
@@ -4052,7 +4021,7 @@
           <a:p>
             <a:fld id="{846CE7D5-CF57-46EF-B807-FDD0502418D4}" type="datetimeFigureOut">
               <a:rPr lang="en-US" smtClean="0"/>
-              <a:t>10/12/2025</a:t>
+              <a:t>3/4/2026</a:t>
             </a:fld>
             <a:endParaRPr lang="en-US"/>
           </a:p>
@@ -4284,7 +4253,7 @@
           <a:p>
             <a:fld id="{846CE7D5-CF57-46EF-B807-FDD0502418D4}" type="datetimeFigureOut">
               <a:rPr lang="en-US" smtClean="0"/>
-              <a:t>10/12/2025</a:t>
+              <a:t>3/4/2026</a:t>
             </a:fld>
             <a:endParaRPr lang="en-US"/>
           </a:p>
@@ -4651,7 +4620,7 @@
           <a:p>
             <a:fld id="{846CE7D5-CF57-46EF-B807-FDD0502418D4}" type="datetimeFigureOut">
               <a:rPr lang="en-US" smtClean="0"/>
-              <a:t>10/12/2025</a:t>
+              <a:t>3/4/2026</a:t>
             </a:fld>
             <a:endParaRPr lang="en-US"/>
           </a:p>
@@ -4769,7 +4738,7 @@
           <a:p>
             <a:fld id="{846CE7D5-CF57-46EF-B807-FDD0502418D4}" type="datetimeFigureOut">
               <a:rPr lang="en-US" smtClean="0"/>
-              <a:t>10/12/2025</a:t>
+              <a:t>3/4/2026</a:t>
             </a:fld>
             <a:endParaRPr lang="en-US"/>
           </a:p>
@@ -4864,7 +4833,7 @@
           <a:p>
             <a:fld id="{846CE7D5-CF57-46EF-B807-FDD0502418D4}" type="datetimeFigureOut">
               <a:rPr lang="en-US" smtClean="0"/>
-              <a:t>10/12/2025</a:t>
+              <a:t>3/4/2026</a:t>
             </a:fld>
             <a:endParaRPr lang="en-US"/>
           </a:p>
@@ -5141,7 +5110,7 @@
           <a:p>
             <a:fld id="{846CE7D5-CF57-46EF-B807-FDD0502418D4}" type="datetimeFigureOut">
               <a:rPr lang="en-US" smtClean="0"/>
-              <a:t>10/12/2025</a:t>
+              <a:t>3/4/2026</a:t>
             </a:fld>
             <a:endParaRPr lang="en-US"/>
           </a:p>
@@ -5398,7 +5367,7 @@
           <a:p>
             <a:fld id="{846CE7D5-CF57-46EF-B807-FDD0502418D4}" type="datetimeFigureOut">
               <a:rPr lang="en-US" smtClean="0"/>
-              <a:t>10/12/2025</a:t>
+              <a:t>3/4/2026</a:t>
             </a:fld>
             <a:endParaRPr lang="en-US"/>
           </a:p>
@@ -5611,7 +5580,7 @@
           <a:p>
             <a:fld id="{846CE7D5-CF57-46EF-B807-FDD0502418D4}" type="datetimeFigureOut">
               <a:rPr lang="en-US" smtClean="0"/>
-              <a:t>10/12/2025</a:t>
+              <a:t>3/4/2026</a:t>
             </a:fld>
             <a:endParaRPr lang="en-US"/>
           </a:p>
@@ -6062,11 +6031,7 @@
             </a:br>
             <a:r>
               <a:rPr lang="en-IE" sz="2200" dirty="0"/>
-              <a:t>By: Mujahid Tabassum </a:t>
-            </a:r>
-            <a:r>
-              <a:rPr lang="en-IE" sz="2200"/>
-              <a:t>- 2025</a:t>
+              <a:t>By: Mujahid Tabassum - 2026</a:t>
             </a:r>
             <a:endParaRPr lang="en-US" sz="2200" dirty="0">
               <a:solidFill>
